--- a/MiniProject1 Analysis Slides.pptx
+++ b/MiniProject1 Analysis Slides.pptx
@@ -310,7 +310,7 @@
           <a:p>
             <a:fld id="{5BCAD085-E8A6-8845-BD4E-CB4CCA059FC4}" type="datetimeFigureOut">
               <a:rPr lang="en-US" smtClean="0"/>
-              <a:t>9/8/2026</a:t>
+              <a:t>9/14/2026</a:t>
             </a:fld>
             <a:endParaRPr lang="en-US"/>
           </a:p>
@@ -478,7 +478,7 @@
           <a:p>
             <a:fld id="{5BCAD085-E8A6-8845-BD4E-CB4CCA059FC4}" type="datetimeFigureOut">
               <a:rPr lang="en-US" smtClean="0"/>
-              <a:t>9/8/2026</a:t>
+              <a:t>9/14/2026</a:t>
             </a:fld>
             <a:endParaRPr lang="en-US"/>
           </a:p>
@@ -656,7 +656,7 @@
           <a:p>
             <a:fld id="{5BCAD085-E8A6-8845-BD4E-CB4CCA059FC4}" type="datetimeFigureOut">
               <a:rPr lang="en-US" smtClean="0"/>
-              <a:t>9/8/2026</a:t>
+              <a:t>9/14/2026</a:t>
             </a:fld>
             <a:endParaRPr lang="en-US"/>
           </a:p>
@@ -824,7 +824,7 @@
           <a:p>
             <a:fld id="{5BCAD085-E8A6-8845-BD4E-CB4CCA059FC4}" type="datetimeFigureOut">
               <a:rPr lang="en-US" smtClean="0"/>
-              <a:t>9/8/2026</a:t>
+              <a:t>9/14/2026</a:t>
             </a:fld>
             <a:endParaRPr lang="en-US"/>
           </a:p>
@@ -1069,7 +1069,7 @@
           <a:p>
             <a:fld id="{5BCAD085-E8A6-8845-BD4E-CB4CCA059FC4}" type="datetimeFigureOut">
               <a:rPr lang="en-US" smtClean="0"/>
-              <a:t>9/8/2026</a:t>
+              <a:t>9/14/2026</a:t>
             </a:fld>
             <a:endParaRPr lang="en-US"/>
           </a:p>
@@ -1354,7 +1354,7 @@
           <a:p>
             <a:fld id="{5BCAD085-E8A6-8845-BD4E-CB4CCA059FC4}" type="datetimeFigureOut">
               <a:rPr lang="en-US" smtClean="0"/>
-              <a:t>9/8/2026</a:t>
+              <a:t>9/14/2026</a:t>
             </a:fld>
             <a:endParaRPr lang="en-US"/>
           </a:p>
@@ -1773,7 +1773,7 @@
           <a:p>
             <a:fld id="{5BCAD085-E8A6-8845-BD4E-CB4CCA059FC4}" type="datetimeFigureOut">
               <a:rPr lang="en-US" smtClean="0"/>
-              <a:t>9/8/2026</a:t>
+              <a:t>9/14/2026</a:t>
             </a:fld>
             <a:endParaRPr lang="en-US"/>
           </a:p>
@@ -1890,7 +1890,7 @@
           <a:p>
             <a:fld id="{5BCAD085-E8A6-8845-BD4E-CB4CCA059FC4}" type="datetimeFigureOut">
               <a:rPr lang="en-US" smtClean="0"/>
-              <a:t>9/8/2026</a:t>
+              <a:t>9/14/2026</a:t>
             </a:fld>
             <a:endParaRPr lang="en-US"/>
           </a:p>
@@ -1985,7 +1985,7 @@
           <a:p>
             <a:fld id="{5BCAD085-E8A6-8845-BD4E-CB4CCA059FC4}" type="datetimeFigureOut">
               <a:rPr lang="en-US" smtClean="0"/>
-              <a:t>9/8/2026</a:t>
+              <a:t>9/14/2026</a:t>
             </a:fld>
             <a:endParaRPr lang="en-US"/>
           </a:p>
@@ -2260,7 +2260,7 @@
           <a:p>
             <a:fld id="{5BCAD085-E8A6-8845-BD4E-CB4CCA059FC4}" type="datetimeFigureOut">
               <a:rPr lang="en-US" smtClean="0"/>
-              <a:t>9/8/2026</a:t>
+              <a:t>9/14/2026</a:t>
             </a:fld>
             <a:endParaRPr lang="en-US"/>
           </a:p>
@@ -2512,7 +2512,7 @@
           <a:p>
             <a:fld id="{5BCAD085-E8A6-8845-BD4E-CB4CCA059FC4}" type="datetimeFigureOut">
               <a:rPr lang="en-US" smtClean="0"/>
-              <a:t>9/8/2026</a:t>
+              <a:t>9/14/2026</a:t>
             </a:fld>
             <a:endParaRPr lang="en-US"/>
           </a:p>
@@ -2723,7 +2723,7 @@
           <a:p>
             <a:fld id="{5BCAD085-E8A6-8845-BD4E-CB4CCA059FC4}" type="datetimeFigureOut">
               <a:rPr lang="en-US" smtClean="0"/>
-              <a:t>9/8/2026</a:t>
+              <a:t>9/14/2026</a:t>
             </a:fld>
             <a:endParaRPr lang="en-US"/>
           </a:p>
@@ -3479,8 +3479,8 @@
         </p:nvSpPr>
         <p:spPr>
           <a:xfrm>
-            <a:off x="822960" y="1600200"/>
-            <a:ext cx="10561320" cy="1234440"/>
+            <a:off x="822960" y="1524923"/>
+            <a:ext cx="10561320" cy="1384995"/>
           </a:xfrm>
           <a:prstGeom prst="rect">
             <a:avLst/>
@@ -3495,13 +3495,13 @@
           <a:p>
             <a:pPr algn="ctr"/>
             <a:r>
-              <a:rPr sz="2800" b="0">
+              <a:rPr sz="2800" b="0" dirty="0">
                 <a:solidFill>
                   <a:srgbClr val="000000"/>
                 </a:solidFill>
                 <a:latin typeface="Arial"/>
               </a:rPr>
-              <a:t>How much does word choice change across English versions of the Odyssey — and can vocabulary patterns show differences between translations and rewrites?</a:t>
+              <a:t>How much does word choice change across English versions of the Odyssey and can vocabulary patterns show differences between translations and rewrites?</a:t>
             </a:r>
           </a:p>
         </p:txBody>
